--- a/presentations/Shiny.NET-Overview.pptx
+++ b/presentations/Shiny.NET-Overview.pptx
@@ -532,7 +532,7 @@
           <a:p>
             <a:r>
               <a:rPr lang="en-US" dirty="0"/>
-              <a:t>Shiny is a suite of 30+ independent .NET libraries. The pitch in one line: the platform-specific plumbing every app needs is already written, tested and shipping in production apps with 40M+ NuGet downloads. Everything here runs on .NET 9+, is AOT and trimming clean, and is MIT licensed.</a:t>
+              <a:t>Shiny is a suite of 50+ independent .NET libraries. The pitch in one line: the platform-specific plumbing every app needs is already written, tested and shipping in production apps with 40M+ NuGet downloads. Everything here runs on .NET 9+, is AOT and trimming clean, and is MIT licensed.</a:t>
             </a:r>
             <a:endParaRPr lang="en-US" dirty="0"/>
           </a:p>
@@ -3778,7 +3778,7 @@
                 <a:ea typeface="Calibri" pitchFamily="34" charset="-122"/>
                 <a:cs typeface="Calibri" pitchFamily="34" charset="-120"/>
               </a:rPr>
-              <a:t>Everything the platform makes hard: Bluetooth, background jobs, push, location, a document database, speech and AI, an HTTP server that runs inside your MAUI app, 67 UI controls, and plenty more. Thirty-plus libraries that own the platform code, the permissions and the background execution — so your time goes to the app your users actually asked for.</a:t>
+              <a:t>Everything the platform makes hard: Bluetooth, background jobs, push, location, a document database, speech and AI, an HTTP server that runs inside your MAUI app, 85+ UI controls, and plenty more. Fifty-plus libraries that own the platform code, the permissions and the background execution — so your time goes to the app your users actually asked for.</a:t>
             </a:r>
             <a:endParaRPr lang="en-US" sz="1300" dirty="0"/>
           </a:p>
@@ -3895,7 +3895,7 @@
                 <a:ea typeface="Arial" pitchFamily="34" charset="-122"/>
                 <a:cs typeface="Arial" pitchFamily="34" charset="-120"/>
               </a:rPr>
-              <a:t>30+</a:t>
+              <a:t>50+</a:t>
             </a:r>
             <a:endParaRPr lang="en-US" sz="3200" dirty="0"/>
           </a:p>
@@ -3973,7 +3973,7 @@
                 <a:ea typeface="Arial" pitchFamily="34" charset="-122"/>
                 <a:cs typeface="Arial" pitchFamily="34" charset="-120"/>
               </a:rPr>
-              <a:t>67</a:t>
+              <a:t>85+</a:t>
             </a:r>
             <a:endParaRPr lang="en-US" sz="3200" dirty="0"/>
           </a:p>
@@ -13164,7 +13164,7 @@
                 <a:ea typeface="Calibri" pitchFamily="34" charset="-122"/>
                 <a:cs typeface="Calibri" pitchFamily="34" charset="-120"/>
               </a:rPr>
-              <a:t>67 native controls for .NET MAUI and Blazor out of one design system — no WebViews, no per-platform forks.</a:t>
+              <a:t>85+ native controls for .NET MAUI and Blazor out of one design system — no WebViews, no per-platform forks.</a:t>
             </a:r>
             <a:endParaRPr lang="en-US" sz="1400" dirty="0"/>
           </a:p>
@@ -13628,7 +13628,7 @@
                 <a:ea typeface="Arial" pitchFamily="34" charset="-122"/>
                 <a:cs typeface="Arial" pitchFamily="34" charset="-120"/>
               </a:rPr>
-              <a:t>67 controls, two hosts, one theme contract</a:t>
+              <a:t>85+ controls, two hosts, one theme contract</a:t>
             </a:r>
             <a:endParaRPr lang="en-US" sz="3200" dirty="0"/>
           </a:p>
@@ -28260,7 +28260,7 @@
                 <a:ea typeface="Arial" pitchFamily="34" charset="-122"/>
                 <a:cs typeface="Arial" pitchFamily="34" charset="-120"/>
               </a:rPr>
-              <a:t>Thirty-plus packages, nine problem areas</a:t>
+              <a:t>Fifty-plus packages, nine problem areas</a:t>
             </a:r>
             <a:endParaRPr lang="en-US" sz="3200" dirty="0"/>
           </a:p>
@@ -29464,7 +29464,7 @@
                 <a:ea typeface="Calibri" pitchFamily="34" charset="-122"/>
                 <a:cs typeface="Calibri" pitchFamily="34" charset="-120"/>
               </a:rPr>
-              <a:t>67 controls for MAUI and Blazor, one theme contract</a:t>
+              <a:t>85+ controls for MAUI and Blazor, one theme contract</a:t>
             </a:r>
             <a:endParaRPr lang="en-US" sz="1050" dirty="0"/>
           </a:p>
@@ -31285,7 +31285,7 @@
                 <a:ea typeface="Calibri" pitchFamily="34" charset="-122"/>
                 <a:cs typeface="Calibri" pitchFamily="34" charset="-120"/>
               </a:rPr>
-              <a:t>Everything the platform makes hard: Bluetooth, background jobs, push, location, a document database, speech and AI, an HTTP server that runs inside your MAUI app, 67 UI controls, and plenty more.</a:t>
+              <a:t>Everything the platform makes hard: Bluetooth, background jobs, push, location, a document database, speech and AI, an HTTP server that runs inside your MAUI app, 85+ UI controls, and plenty more.</a:t>
             </a:r>
             <a:endParaRPr lang="en-US" sz="1100" dirty="0"/>
           </a:p>
@@ -31327,7 +31327,7 @@
                 <a:ea typeface="Calibri" pitchFamily="34" charset="-122"/>
                 <a:cs typeface="Calibri" pitchFamily="34" charset="-120"/>
               </a:rPr>
-              <a:t>Thirty-plus libraries that own the platform code, the permissions and the background execution — so your time goes to the app your users actually asked for.</a:t>
+              <a:t>Fifty-plus libraries that own the platform code, the permissions and the background execution — so your time goes to the app your users actually asked for.</a:t>
             </a:r>
             <a:endParaRPr lang="en-US" sz="1000" dirty="0"/>
           </a:p>
